--- a/output.pptx
+++ b/output.pptx
@@ -197,7 +197,7 @@
           <a:p>
             <a:fld id="{17E1D49D-48C3-4654-940B-94FADE24DBDF}" type="datetimeFigureOut">
               <a:rPr lang="ko-KR" altLang="en-US" smtClean="0"/>
-              <a:t>2025-06-01</a:t>
+              <a:t>2025-06-04</a:t>
             </a:fld>
             <a:endParaRPr lang="ko-KR" altLang="en-US"/>
           </a:p>
@@ -779,7 +779,7 @@
           <a:p>
             <a:fld id="{502CD248-AE16-47FA-AF5A-2F10FD8A8207}" type="datetimeFigureOut">
               <a:rPr lang="ko-KR" altLang="en-US" smtClean="0"/>
-              <a:t>2025-06-01</a:t>
+              <a:t>2025-06-04</a:t>
             </a:fld>
             <a:endParaRPr lang="ko-KR" altLang="en-US"/>
           </a:p>
@@ -977,7 +977,7 @@
           <a:p>
             <a:fld id="{502CD248-AE16-47FA-AF5A-2F10FD8A8207}" type="datetimeFigureOut">
               <a:rPr lang="ko-KR" altLang="en-US" smtClean="0"/>
-              <a:t>2025-06-01</a:t>
+              <a:t>2025-06-04</a:t>
             </a:fld>
             <a:endParaRPr lang="ko-KR" altLang="en-US"/>
           </a:p>
@@ -1185,7 +1185,7 @@
           <a:p>
             <a:fld id="{502CD248-AE16-47FA-AF5A-2F10FD8A8207}" type="datetimeFigureOut">
               <a:rPr lang="ko-KR" altLang="en-US" smtClean="0"/>
-              <a:t>2025-06-01</a:t>
+              <a:t>2025-06-04</a:t>
             </a:fld>
             <a:endParaRPr lang="ko-KR" altLang="en-US"/>
           </a:p>
@@ -1383,7 +1383,7 @@
           <a:p>
             <a:fld id="{502CD248-AE16-47FA-AF5A-2F10FD8A8207}" type="datetimeFigureOut">
               <a:rPr lang="ko-KR" altLang="en-US" smtClean="0"/>
-              <a:t>2025-06-01</a:t>
+              <a:t>2025-06-04</a:t>
             </a:fld>
             <a:endParaRPr lang="ko-KR" altLang="en-US"/>
           </a:p>
@@ -1658,7 +1658,7 @@
           <a:p>
             <a:fld id="{502CD248-AE16-47FA-AF5A-2F10FD8A8207}" type="datetimeFigureOut">
               <a:rPr lang="ko-KR" altLang="en-US" smtClean="0"/>
-              <a:t>2025-06-01</a:t>
+              <a:t>2025-06-04</a:t>
             </a:fld>
             <a:endParaRPr lang="ko-KR" altLang="en-US"/>
           </a:p>
@@ -1923,7 +1923,7 @@
           <a:p>
             <a:fld id="{502CD248-AE16-47FA-AF5A-2F10FD8A8207}" type="datetimeFigureOut">
               <a:rPr lang="ko-KR" altLang="en-US" smtClean="0"/>
-              <a:t>2025-06-01</a:t>
+              <a:t>2025-06-04</a:t>
             </a:fld>
             <a:endParaRPr lang="ko-KR" altLang="en-US"/>
           </a:p>
@@ -2335,7 +2335,7 @@
           <a:p>
             <a:fld id="{502CD248-AE16-47FA-AF5A-2F10FD8A8207}" type="datetimeFigureOut">
               <a:rPr lang="ko-KR" altLang="en-US" smtClean="0"/>
-              <a:t>2025-06-01</a:t>
+              <a:t>2025-06-04</a:t>
             </a:fld>
             <a:endParaRPr lang="ko-KR" altLang="en-US"/>
           </a:p>
@@ -2476,7 +2476,7 @@
           <a:p>
             <a:fld id="{502CD248-AE16-47FA-AF5A-2F10FD8A8207}" type="datetimeFigureOut">
               <a:rPr lang="ko-KR" altLang="en-US" smtClean="0"/>
-              <a:t>2025-06-01</a:t>
+              <a:t>2025-06-04</a:t>
             </a:fld>
             <a:endParaRPr lang="ko-KR" altLang="en-US"/>
           </a:p>
@@ -2589,7 +2589,7 @@
           <a:p>
             <a:fld id="{502CD248-AE16-47FA-AF5A-2F10FD8A8207}" type="datetimeFigureOut">
               <a:rPr lang="ko-KR" altLang="en-US" smtClean="0"/>
-              <a:t>2025-06-01</a:t>
+              <a:t>2025-06-04</a:t>
             </a:fld>
             <a:endParaRPr lang="ko-KR" altLang="en-US"/>
           </a:p>
@@ -2900,7 +2900,7 @@
           <a:p>
             <a:fld id="{502CD248-AE16-47FA-AF5A-2F10FD8A8207}" type="datetimeFigureOut">
               <a:rPr lang="ko-KR" altLang="en-US" smtClean="0"/>
-              <a:t>2025-06-01</a:t>
+              <a:t>2025-06-04</a:t>
             </a:fld>
             <a:endParaRPr lang="ko-KR" altLang="en-US"/>
           </a:p>
@@ -3188,7 +3188,7 @@
           <a:p>
             <a:fld id="{502CD248-AE16-47FA-AF5A-2F10FD8A8207}" type="datetimeFigureOut">
               <a:rPr lang="ko-KR" altLang="en-US" smtClean="0"/>
-              <a:t>2025-06-01</a:t>
+              <a:t>2025-06-04</a:t>
             </a:fld>
             <a:endParaRPr lang="ko-KR" altLang="en-US"/>
           </a:p>
@@ -3429,7 +3429,7 @@
           <a:p>
             <a:fld id="{502CD248-AE16-47FA-AF5A-2F10FD8A8207}" type="datetimeFigureOut">
               <a:rPr lang="ko-KR" altLang="en-US" smtClean="0"/>
-              <a:t>2025-06-01</a:t>
+              <a:t>2025-06-04</a:t>
             </a:fld>
             <a:endParaRPr lang="ko-KR" altLang="en-US"/>
           </a:p>
@@ -3988,7 +3988,7 @@
               </a:defRPr>
             </a:pPr>
             <a:r>
-              <a:t>창세기</a:t>
+              <a:t>창세기 1:1-3</a:t>
             </a:r>
             <a:endParaRPr kumimoji="1" lang="en-US" altLang="ko-KR" sz="3733" b="1" i="0" u="none" strike="noStrike" kern="1200" cap="none" spc="0" normalizeH="0" baseline="0" noProof="0" dirty="0">
               <a:ln>
@@ -4014,35 +4014,6 @@
                 <a:latin typeface="나눔스퀘어 네오 ExtraBold"/>
               </a:defRPr>
             </a:pPr>
-            <a:r>
-              <a:t>1:1</a:t>
-            </a:r>
-          </a:p>
-          <a:p>
-            <a:pPr>
-              <a:defRPr sz="3729">
-                <a:solidFill>
-                  <a:srgbClr val="1F3337"/>
-                </a:solidFill>
-                <a:latin typeface="나눔스퀘어 네오 ExtraBold"/>
-              </a:defRPr>
-            </a:pPr>
-            <a:r>
-              <a:t>창세기</a:t>
-            </a:r>
-          </a:p>
-          <a:p>
-            <a:pPr>
-              <a:defRPr sz="3729">
-                <a:solidFill>
-                  <a:srgbClr val="1F3337"/>
-                </a:solidFill>
-                <a:latin typeface="나눔스퀘어 네오 ExtraBold"/>
-              </a:defRPr>
-            </a:pPr>
-            <a:r>
-              <a:t>2:2</a:t>
-            </a:r>
           </a:p>
         </p:txBody>
       </p:sp>
@@ -5218,7 +5189,7 @@
               </a:defRPr>
             </a:pPr>
             <a:r>
-              <a:t>Gen 1:1</a:t>
+              <a:t>Gen 1:1-3</a:t>
             </a:r>
             <a:endParaRPr kumimoji="1" lang="en-US" altLang="ko-KR" sz="2800" b="1" i="0" u="none" strike="noStrike" kern="1200" cap="none" spc="0" normalizeH="0" baseline="0" noProof="0" dirty="0">
               <a:ln>
@@ -5244,19 +5215,6 @@
                 <a:latin typeface="나눔스퀘어 네오 ExtraBold"/>
               </a:defRPr>
             </a:pPr>
-            <a:r>
-              <a:t>Gen 2:2</a:t>
-            </a:r>
-          </a:p>
-          <a:p>
-            <a:pPr>
-              <a:defRPr sz="2800">
-                <a:solidFill>
-                  <a:srgbClr val="8FA79F"/>
-                </a:solidFill>
-                <a:latin typeface="나눔스퀘어 네오 ExtraBold"/>
-              </a:defRPr>
-            </a:pPr>
           </a:p>
         </p:txBody>
       </p:sp>
@@ -5310,7 +5268,20 @@
               </a:defRPr>
             </a:pPr>
             <a:r>
-              <a:t>² 하나님이 그가 하시던 일을 일곱째 날에 마치시니 그가 하시던 모든 일을 그치고 일곱째 날에 안식하시니라</a:t>
+              <a:t>² 땅이 혼돈하고 공허하며 흑암이 깊음 위에 있고 하나님의 영은 수면 위에 운행하시니라</a:t>
+            </a:r>
+          </a:p>
+          <a:p>
+            <a:pPr>
+              <a:defRPr sz="2800">
+                <a:solidFill>
+                  <a:srgbClr val="1F3337"/>
+                </a:solidFill>
+                <a:latin typeface="나눔스퀘어 네오 Bold"/>
+              </a:defRPr>
+            </a:pPr>
+            <a:r>
+              <a:t>³ 하나님이 이르시되 빛이 있으라 하시니 빛이 있었고</a:t>
             </a:r>
           </a:p>
         </p:txBody>
@@ -5329,7 +5300,7 @@
         </p:nvSpPr>
         <p:spPr>
           <a:xfrm>
-            <a:off x="4606904" y="3088441"/>
+            <a:off x="4606908" y="3992331"/>
             <a:ext cx="7246821" cy="369332"/>
           </a:xfrm>
           <a:prstGeom prst="rect">
@@ -5366,7 +5337,20 @@
               </a:defRPr>
             </a:pPr>
             <a:r>
-              <a:t>² And on the seventh day God finished his work that he had done, and he rested on the seventh day from all his work that he had done.</a:t>
+              <a:t>² The earth was without form and void, and darkness was over the face of the deep. And the Spirit of God was hovering over the face of the waters.</a:t>
+            </a:r>
+          </a:p>
+          <a:p>
+            <a:pPr>
+              <a:defRPr sz="2000">
+                <a:solidFill>
+                  <a:srgbClr val="4F655E"/>
+                </a:solidFill>
+                <a:latin typeface="Pretendard Variable"/>
+              </a:defRPr>
+            </a:pPr>
+            <a:r>
+              <a:t>³ And God said, "Let there be light," and there was light.</a:t>
             </a:r>
           </a:p>
         </p:txBody>

--- a/output.pptx
+++ b/output.pptx
@@ -3988,7 +3988,7 @@
               </a:defRPr>
             </a:pPr>
             <a:r>
-              <a:t>창세기 1:1-3</a:t>
+              <a:t>창세기 1:1</a:t>
             </a:r>
             <a:endParaRPr kumimoji="1" lang="en-US" altLang="ko-KR" sz="3733" b="1" i="0" u="none" strike="noStrike" kern="1200" cap="none" spc="0" normalizeH="0" baseline="0" noProof="0" dirty="0">
               <a:ln>
@@ -4004,6 +4004,19 @@
               <a:ea typeface="나눔스퀘어 네오 ExtraBold" panose="00000900000000000000" pitchFamily="2" charset="-127"/>
               <a:cs typeface="+mn-cs"/>
             </a:endParaRPr>
+          </a:p>
+          <a:p>
+            <a:pPr>
+              <a:defRPr sz="3729">
+                <a:solidFill>
+                  <a:srgbClr val="1F3337"/>
+                </a:solidFill>
+                <a:latin typeface="나눔스퀘어 네오 ExtraBold"/>
+              </a:defRPr>
+            </a:pPr>
+            <a:r>
+              <a:t>마태복음 5:1</a:t>
+            </a:r>
           </a:p>
           <a:p>
             <a:pPr>
@@ -5189,7 +5202,7 @@
               </a:defRPr>
             </a:pPr>
             <a:r>
-              <a:t>Gen 1:1-3</a:t>
+              <a:t>Gen 1:1</a:t>
             </a:r>
             <a:endParaRPr kumimoji="1" lang="en-US" altLang="ko-KR" sz="2800" b="1" i="0" u="none" strike="noStrike" kern="1200" cap="none" spc="0" normalizeH="0" baseline="0" noProof="0" dirty="0">
               <a:ln>
@@ -5215,6 +5228,19 @@
                 <a:latin typeface="나눔스퀘어 네오 ExtraBold"/>
               </a:defRPr>
             </a:pPr>
+            <a:r>
+              <a:t>Mat 5:1</a:t>
+            </a:r>
+          </a:p>
+          <a:p>
+            <a:pPr>
+              <a:defRPr sz="2800">
+                <a:solidFill>
+                  <a:srgbClr val="8FA79F"/>
+                </a:solidFill>
+                <a:latin typeface="나눔스퀘어 네오 ExtraBold"/>
+              </a:defRPr>
+            </a:pPr>
           </a:p>
         </p:txBody>
       </p:sp>
@@ -5268,20 +5294,7 @@
               </a:defRPr>
             </a:pPr>
             <a:r>
-              <a:t>² 땅이 혼돈하고 공허하며 흑암이 깊음 위에 있고 하나님의 영은 수면 위에 운행하시니라</a:t>
-            </a:r>
-          </a:p>
-          <a:p>
-            <a:pPr>
-              <a:defRPr sz="2800">
-                <a:solidFill>
-                  <a:srgbClr val="1F3337"/>
-                </a:solidFill>
-                <a:latin typeface="나눔스퀘어 네오 Bold"/>
-              </a:defRPr>
-            </a:pPr>
-            <a:r>
-              <a:t>³ 하나님이 이르시되 빛이 있으라 하시니 빛이 있었고</a:t>
+              <a:t>¹ 예수께서 무리를 보시고 산에 올라가 앉으시니 제자들이 나아온지라</a:t>
             </a:r>
           </a:p>
         </p:txBody>
@@ -5337,20 +5350,7 @@
               </a:defRPr>
             </a:pPr>
             <a:r>
-              <a:t>² The earth was without form and void, and darkness was over the face of the deep. And the Spirit of God was hovering over the face of the waters.</a:t>
-            </a:r>
-          </a:p>
-          <a:p>
-            <a:pPr>
-              <a:defRPr sz="2000">
-                <a:solidFill>
-                  <a:srgbClr val="4F655E"/>
-                </a:solidFill>
-                <a:latin typeface="Pretendard Variable"/>
-              </a:defRPr>
-            </a:pPr>
-            <a:r>
-              <a:t>³ And God said, "Let there be light," and there was light.</a:t>
+              <a:t>¹ Seeing the crowds, he went up on the mountain, and when he sat down, his disciples came to him.</a:t>
             </a:r>
           </a:p>
         </p:txBody>

--- a/output.pptx
+++ b/output.pptx
@@ -4015,7 +4015,7 @@
               </a:defRPr>
             </a:pPr>
             <a:r>
-              <a:t>마태복음 5:1</a:t>
+              <a:t>에베소서 2:3</a:t>
             </a:r>
           </a:p>
           <a:p>
@@ -5229,7 +5229,7 @@
               </a:defRPr>
             </a:pPr>
             <a:r>
-              <a:t>Mat 5:1</a:t>
+              <a:t>Eph 2:3</a:t>
             </a:r>
           </a:p>
           <a:p>
@@ -5281,7 +5281,7 @@
               </a:defRPr>
             </a:pPr>
             <a:r>
-              <a:t>¹ 태초에 하나님이 천지를 창조하시니라</a:t>
+              <a:t>¹˸¹ 태초에 하나님이 천지를 창조하시니라</a:t>
             </a:r>
           </a:p>
           <a:p>
@@ -5294,7 +5294,7 @@
               </a:defRPr>
             </a:pPr>
             <a:r>
-              <a:t>¹ 예수께서 무리를 보시고 산에 올라가 앉으시니 제자들이 나아온지라</a:t>
+              <a:t>²˸³ 전에는 우리도 다 그 가운데서 우리 육체의 욕심을 따라 지내며 육체와 마음의 원하는 것을 하여 다른 이들과 같이 본질상 진노의 자녀이었더니</a:t>
             </a:r>
           </a:p>
         </p:txBody>
@@ -5350,7 +5350,7 @@
               </a:defRPr>
             </a:pPr>
             <a:r>
-              <a:t>¹ Seeing the crowds, he went up on the mountain, and when he sat down, his disciples came to him.</a:t>
+              <a:t>³ among whom we all once lived in the passions of our flesh, carrying out the desires of the body and the mind, and were by nature children of wrath, like the rest of mankind.</a:t>
             </a:r>
           </a:p>
         </p:txBody>

--- a/output.pptx
+++ b/output.pptx
@@ -9,6 +9,7 @@
   </p:notesMasterIdLst>
   <p:sldIdLst>
     <p:sldId id="4772" r:id="rId2"/>
+    <p:sldId id="4773" r:id="rId8"/>
   </p:sldIdLst>
   <p:sldSz cx="12192000" cy="6858000"/>
   <p:notesSz cx="6858000" cy="9144000"/>
@@ -3988,7 +3989,7 @@
               </a:defRPr>
             </a:pPr>
             <a:r>
-              <a:t>창세기 1:1</a:t>
+              <a:t>창세기 2:5-7</a:t>
             </a:r>
             <a:endParaRPr kumimoji="1" lang="en-US" altLang="ko-KR" sz="3733" b="1" i="0" u="none" strike="noStrike" kern="1200" cap="none" spc="0" normalizeH="0" baseline="0" noProof="0" dirty="0">
               <a:ln>
@@ -4004,19 +4005,6 @@
               <a:ea typeface="나눔스퀘어 네오 ExtraBold" panose="00000900000000000000" pitchFamily="2" charset="-127"/>
               <a:cs typeface="+mn-cs"/>
             </a:endParaRPr>
-          </a:p>
-          <a:p>
-            <a:pPr>
-              <a:defRPr sz="3729">
-                <a:solidFill>
-                  <a:srgbClr val="1F3337"/>
-                </a:solidFill>
-                <a:latin typeface="나눔스퀘어 네오 ExtraBold"/>
-              </a:defRPr>
-            </a:pPr>
-            <a:r>
-              <a:t>에베소서 2:3</a:t>
-            </a:r>
           </a:p>
           <a:p>
             <a:pPr>
@@ -5202,7 +5190,7 @@
               </a:defRPr>
             </a:pPr>
             <a:r>
-              <a:t>Gen 1:1</a:t>
+              <a:t>Gen 2:5-7</a:t>
             </a:r>
             <a:endParaRPr kumimoji="1" lang="en-US" altLang="ko-KR" sz="2800" b="1" i="0" u="none" strike="noStrike" kern="1200" cap="none" spc="0" normalizeH="0" baseline="0" noProof="0" dirty="0">
               <a:ln>
@@ -5228,19 +5216,6 @@
                 <a:latin typeface="나눔스퀘어 네오 ExtraBold"/>
               </a:defRPr>
             </a:pPr>
-            <a:r>
-              <a:t>Eph 2:3</a:t>
-            </a:r>
-          </a:p>
-          <a:p>
-            <a:pPr>
-              <a:defRPr sz="2800">
-                <a:solidFill>
-                  <a:srgbClr val="8FA79F"/>
-                </a:solidFill>
-                <a:latin typeface="나눔스퀘어 네오 ExtraBold"/>
-              </a:defRPr>
-            </a:pPr>
           </a:p>
         </p:txBody>
       </p:sp>
@@ -5281,7 +5256,7 @@
               </a:defRPr>
             </a:pPr>
             <a:r>
-              <a:t>¹˸¹ 태초에 하나님이 천지를 창조하시니라</a:t>
+              <a:t>⁵ 여호와 하나님이 땅에 비를 내리지 아니하셨고 땅을 갈 사람도 없었으므로 들에는 초목이 아직 없었고 밭에는 채소가 나지 아니하였으며</a:t>
             </a:r>
           </a:p>
           <a:p>
@@ -5294,7 +5269,20 @@
               </a:defRPr>
             </a:pPr>
             <a:r>
-              <a:t>²˸³ 전에는 우리도 다 그 가운데서 우리 육체의 욕심을 따라 지내며 육체와 마음의 원하는 것을 하여 다른 이들과 같이 본질상 진노의 자녀이었더니</a:t>
+              <a:t>⁶ 안개만 땅에서 올라와 온 지면을 적셨더라</a:t>
+            </a:r>
+          </a:p>
+          <a:p>
+            <a:pPr>
+              <a:defRPr sz="2800">
+                <a:solidFill>
+                  <a:srgbClr val="1F3337"/>
+                </a:solidFill>
+                <a:latin typeface="나눔스퀘어 네오 Bold"/>
+              </a:defRPr>
+            </a:pPr>
+            <a:r>
+              <a:t>⁷ 여호와 하나님이 땅의 흙으로 사람을 지으시고 생기를 그 코에 불어넣으시니 사람이 생령이 되니라</a:t>
             </a:r>
           </a:p>
         </p:txBody>
@@ -5336,7 +5324,7 @@
               </a:defRPr>
             </a:pPr>
             <a:r>
-              <a:t>¹ In the beginning, God created the heavens and the earth.</a:t>
+              <a:t>⁵ When no bush of the field was yet in the land and no small plant of the field had yet sprung up- for the LORD God had not caused it to rain on the land, and there was no man to work the ground,</a:t>
             </a:r>
             <a:endParaRPr lang="ko-KR" altLang="en-US" dirty="0"/>
           </a:p>
@@ -5350,7 +5338,20 @@
               </a:defRPr>
             </a:pPr>
             <a:r>
-              <a:t>³ among whom we all once lived in the passions of our flesh, carrying out the desires of the body and the mind, and were by nature children of wrath, like the rest of mankind.</a:t>
+              <a:t>⁶ and a mist was going up from the land and was watering the whole face of the ground</a:t>
+            </a:r>
+          </a:p>
+          <a:p>
+            <a:pPr>
+              <a:defRPr sz="2000">
+                <a:solidFill>
+                  <a:srgbClr val="4F655E"/>
+                </a:solidFill>
+                <a:latin typeface="Pretendard Variable"/>
+              </a:defRPr>
+            </a:pPr>
+            <a:r>
+              <a:t>⁷ then the LORD God formed the man of dust from the ground and breathed into his nostrils the breath of life, and the man became a living creature.</a:t>
             </a:r>
           </a:p>
         </p:txBody>
@@ -5361,6 +5362,1527 @@
         <p14:creationId xmlns:p14="http://schemas.microsoft.com/office/powerpoint/2010/main" val="2381306744"/>
       </p:ext>
     </p:extLst>
+  </p:cSld>
+  <p:clrMapOvr>
+    <a:masterClrMapping/>
+  </p:clrMapOvr>
+</p:sld>
+</file>
+
+<file path=ppt/slides/slide2.xml><?xml version="1.0" encoding="utf-8"?>
+<p:sld xmlns:a="http://schemas.openxmlformats.org/drawingml/2006/main" xmlns:p="http://schemas.openxmlformats.org/presentationml/2006/main" xmlns:r="http://schemas.openxmlformats.org/officeDocument/2006/relationships">
+  <p:cSld>
+    <p:spTree>
+      <p:nvGrpSpPr>
+        <p:cNvPr id="1" name=""/>
+        <p:cNvGrpSpPr/>
+        <p:nvPr/>
+      </p:nvGrpSpPr>
+      <p:grpSpPr/>
+      <p:sp>
+        <p:nvSpPr>
+          <p:cNvPr id="23" name="직사각형 22">
+            <a:extLst>
+              <a:ext uri="{FF2B5EF4-FFF2-40B4-BE49-F238E27FC236}">
+                <a16:creationId xmlns:a16="http://schemas.microsoft.com/office/drawing/2014/main" id="{19169C31-E35E-B58F-A814-E65D8A184638}"/>
+              </a:ext>
+            </a:extLst>
+          </p:cNvPr>
+          <p:cNvSpPr/>
+          <p:nvPr/>
+        </p:nvSpPr>
+        <p:spPr>
+          <a:xfrm>
+            <a:off x="-7468" y="0"/>
+            <a:ext cx="4212175" cy="6858000"/>
+          </a:xfrm>
+          <a:prstGeom prst="rect">
+            <a:avLst/>
+          </a:prstGeom>
+          <a:solidFill>
+            <a:schemeClr val="accent6">
+              <a:lumMod val="20000"/>
+              <a:lumOff val="80000"/>
+              <a:alpha val="50000"/>
+            </a:schemeClr>
+          </a:solidFill>
+          <a:ln>
+            <a:noFill/>
+          </a:ln>
+        </p:spPr>
+        <p:style>
+          <a:lnRef idx="2">
+            <a:schemeClr val="accent1">
+              <a:shade val="15000"/>
+            </a:schemeClr>
+          </a:lnRef>
+          <a:fillRef idx="1">
+            <a:schemeClr val="accent1"/>
+          </a:fillRef>
+          <a:effectRef idx="0">
+            <a:schemeClr val="accent1"/>
+          </a:effectRef>
+          <a:fontRef idx="minor">
+            <a:schemeClr val="lt1"/>
+          </a:fontRef>
+        </p:style>
+        <p:txBody>
+          <a:bodyPr rtlCol="0" anchor="ctr"/>
+          <a:lstStyle/>
+          <a:p>
+            <a:pPr marL="0" marR="0" lvl="0" indent="0" algn="ctr" defTabSz="1219140" rtl="0" eaLnBrk="0" fontAlgn="base" latinLnBrk="0" hangingPunct="0">
+              <a:lnSpc>
+                <a:spcPct val="100000"/>
+              </a:lnSpc>
+              <a:spcBef>
+                <a:spcPct val="0"/>
+              </a:spcBef>
+              <a:spcAft>
+                <a:spcPct val="0"/>
+              </a:spcAft>
+              <a:buClrTx/>
+              <a:buSzTx/>
+              <a:buFontTx/>
+              <a:buNone/>
+              <a:tabLst/>
+              <a:defRPr/>
+            </a:pPr>
+            <a:endParaRPr kumimoji="1" lang="ko-KR" altLang="en-US" sz="2400" b="0" i="0" u="none" strike="noStrike" kern="1200" cap="none" spc="0" normalizeH="0" baseline="0" noProof="0" dirty="0">
+              <a:ln>
+                <a:noFill/>
+              </a:ln>
+              <a:solidFill>
+                <a:prstClr val="white"/>
+              </a:solidFill>
+              <a:effectLst/>
+              <a:uLnTx/>
+              <a:uFillTx/>
+              <a:latin typeface="맑은 고딕" panose="020F0502020204030204"/>
+              <a:ea typeface="맑은 고딕" panose="020B0503020000020004" pitchFamily="50" charset="-127"/>
+              <a:cs typeface="+mn-cs"/>
+            </a:endParaRPr>
+          </a:p>
+        </p:txBody>
+      </p:sp>
+      <p:sp>
+        <p:nvSpPr>
+          <p:cNvPr id="10" name="TextBox 9">
+            <a:extLst>
+              <a:ext uri="{FF2B5EF4-FFF2-40B4-BE49-F238E27FC236}">
+                <a16:creationId xmlns:a16="http://schemas.microsoft.com/office/drawing/2014/main" id="{F1C51526-9E46-003D-540D-3596EB5F6E8E}"/>
+              </a:ext>
+            </a:extLst>
+          </p:cNvPr>
+          <p:cNvSpPr txBox="1"/>
+          <p:nvPr/>
+        </p:nvSpPr>
+        <p:spPr>
+          <a:xfrm>
+            <a:off x="541691" y="568591"/>
+            <a:ext cx="3867332" cy="666786"/>
+          </a:xfrm>
+          <a:prstGeom prst="rect">
+            <a:avLst/>
+          </a:prstGeom>
+          <a:noFill/>
+        </p:spPr>
+        <p:txBody>
+          <a:bodyPr wrap="square" rtlCol="0">
+            <a:spAutoFit/>
+          </a:bodyPr>
+          <a:lstStyle/>
+          <a:p>
+            <a:pPr marL="0" marR="0" lvl="0" indent="0" algn="l" defTabSz="1219140" rtl="0" eaLnBrk="0" fontAlgn="base" latinLnBrk="0" hangingPunct="0">
+              <a:lnSpc>
+                <a:spcPct val="100000"/>
+              </a:lnSpc>
+              <a:spcBef>
+                <a:spcPct val="0"/>
+              </a:spcBef>
+              <a:spcAft>
+                <a:spcPct val="0"/>
+              </a:spcAft>
+              <a:buClrTx/>
+              <a:buSzTx/>
+              <a:buFontTx/>
+              <a:buNone/>
+              <a:tabLst/>
+              <a:defRPr sz="3729">
+                <a:solidFill>
+                  <a:srgbClr val="1F3337"/>
+                </a:solidFill>
+                <a:latin typeface="나눔스퀘어 네오 ExtraBold"/>
+              </a:defRPr>
+            </a:pPr>
+            <a:r>
+              <a:t>시편 1:1</a:t>
+            </a:r>
+            <a:endParaRPr kumimoji="1" lang="en-US" altLang="ko-KR" sz="3733" b="1" i="0" u="none" strike="noStrike" kern="1200" cap="none" spc="0" normalizeH="0" baseline="0" noProof="0" dirty="0">
+              <a:ln>
+                <a:noFill/>
+              </a:ln>
+              <a:solidFill>
+                <a:srgbClr val="213337"/>
+              </a:solidFill>
+              <a:effectLst/>
+              <a:uLnTx/>
+              <a:uFillTx/>
+              <a:latin typeface="나눔스퀘어 네오 ExtraBold" panose="00000900000000000000" pitchFamily="2" charset="-127"/>
+              <a:ea typeface="나눔스퀘어 네오 ExtraBold" panose="00000900000000000000" pitchFamily="2" charset="-127"/>
+              <a:cs typeface="+mn-cs"/>
+            </a:endParaRPr>
+          </a:p>
+          <a:p>
+            <a:pPr>
+              <a:defRPr sz="3729">
+                <a:solidFill>
+                  <a:srgbClr val="1F3337"/>
+                </a:solidFill>
+                <a:latin typeface="나눔스퀘어 네오 ExtraBold"/>
+              </a:defRPr>
+            </a:pPr>
+            <a:r>
+              <a:t>요한계시록 2:2</a:t>
+            </a:r>
+          </a:p>
+          <a:p>
+            <a:pPr>
+              <a:defRPr sz="3729">
+                <a:solidFill>
+                  <a:srgbClr val="1F3337"/>
+                </a:solidFill>
+                <a:latin typeface="나눔스퀘어 네오 ExtraBold"/>
+              </a:defRPr>
+            </a:pPr>
+          </a:p>
+        </p:txBody>
+      </p:sp>
+      <p:cxnSp>
+        <p:nvCxnSpPr>
+          <p:cNvPr id="14" name="직선 연결선 13">
+            <a:extLst>
+              <a:ext uri="{FF2B5EF4-FFF2-40B4-BE49-F238E27FC236}">
+                <a16:creationId xmlns:a16="http://schemas.microsoft.com/office/drawing/2014/main" id="{DF27D16E-3EE5-D795-3F3F-D360817DC3AA}"/>
+              </a:ext>
+            </a:extLst>
+          </p:cNvPr>
+          <p:cNvCxnSpPr>
+            <a:cxnSpLocks/>
+          </p:cNvCxnSpPr>
+          <p:nvPr/>
+        </p:nvCxnSpPr>
+        <p:spPr>
+          <a:xfrm>
+            <a:off x="4212177" y="241302"/>
+            <a:ext cx="0" cy="6379633"/>
+          </a:xfrm>
+          <a:prstGeom prst="line">
+            <a:avLst/>
+          </a:prstGeom>
+          <a:ln w="19050">
+            <a:solidFill>
+              <a:srgbClr val="213337"/>
+            </a:solidFill>
+          </a:ln>
+        </p:spPr>
+        <p:style>
+          <a:lnRef idx="1">
+            <a:schemeClr val="accent2"/>
+          </a:lnRef>
+          <a:fillRef idx="0">
+            <a:schemeClr val="accent2"/>
+          </a:fillRef>
+          <a:effectRef idx="0">
+            <a:schemeClr val="accent2"/>
+          </a:effectRef>
+          <a:fontRef idx="minor">
+            <a:schemeClr val="tx1"/>
+          </a:fontRef>
+        </p:style>
+      </p:cxnSp>
+      <p:sp>
+        <p:nvSpPr>
+          <p:cNvPr id="15" name="타원 14">
+            <a:extLst>
+              <a:ext uri="{FF2B5EF4-FFF2-40B4-BE49-F238E27FC236}">
+                <a16:creationId xmlns:a16="http://schemas.microsoft.com/office/drawing/2014/main" id="{07FD1CA4-A20B-11FC-E23C-FC5F3F624592}"/>
+              </a:ext>
+            </a:extLst>
+          </p:cNvPr>
+          <p:cNvSpPr/>
+          <p:nvPr/>
+        </p:nvSpPr>
+        <p:spPr>
+          <a:xfrm>
+            <a:off x="4095764" y="578135"/>
+            <a:ext cx="228595" cy="228595"/>
+          </a:xfrm>
+          <a:prstGeom prst="ellipse">
+            <a:avLst/>
+          </a:prstGeom>
+          <a:solidFill>
+            <a:srgbClr val="213337"/>
+          </a:solidFill>
+          <a:ln>
+            <a:noFill/>
+          </a:ln>
+        </p:spPr>
+        <p:style>
+          <a:lnRef idx="2">
+            <a:schemeClr val="accent1">
+              <a:shade val="15000"/>
+            </a:schemeClr>
+          </a:lnRef>
+          <a:fillRef idx="1">
+            <a:schemeClr val="accent1"/>
+          </a:fillRef>
+          <a:effectRef idx="0">
+            <a:schemeClr val="accent1"/>
+          </a:effectRef>
+          <a:fontRef idx="minor">
+            <a:schemeClr val="lt1"/>
+          </a:fontRef>
+        </p:style>
+        <p:txBody>
+          <a:bodyPr rtlCol="0" anchor="ctr"/>
+          <a:lstStyle/>
+          <a:p>
+            <a:pPr marL="0" marR="0" lvl="0" indent="0" algn="ctr" defTabSz="1219140" rtl="0" eaLnBrk="0" fontAlgn="base" latinLnBrk="0" hangingPunct="0">
+              <a:lnSpc>
+                <a:spcPct val="100000"/>
+              </a:lnSpc>
+              <a:spcBef>
+                <a:spcPct val="0"/>
+              </a:spcBef>
+              <a:spcAft>
+                <a:spcPct val="0"/>
+              </a:spcAft>
+              <a:buClrTx/>
+              <a:buSzTx/>
+              <a:buFontTx/>
+              <a:buNone/>
+              <a:tabLst/>
+              <a:defRPr/>
+            </a:pPr>
+            <a:endParaRPr kumimoji="1" lang="ko-KR" altLang="en-US" sz="2400" b="0" i="0" u="none" strike="noStrike" kern="1200" cap="none" spc="0" normalizeH="0" baseline="0" noProof="0">
+              <a:ln>
+                <a:noFill/>
+              </a:ln>
+              <a:solidFill>
+                <a:prstClr val="white"/>
+              </a:solidFill>
+              <a:effectLst/>
+              <a:uLnTx/>
+              <a:uFillTx/>
+              <a:latin typeface="맑은 고딕" panose="020F0502020204030204"/>
+              <a:ea typeface="맑은 고딕" panose="020B0503020000020004" pitchFamily="50" charset="-127"/>
+              <a:cs typeface="+mn-cs"/>
+            </a:endParaRPr>
+          </a:p>
+        </p:txBody>
+      </p:sp>
+      <p:sp>
+        <p:nvSpPr>
+          <p:cNvPr id="22" name="그래픽 20">
+            <a:extLst>
+              <a:ext uri="{FF2B5EF4-FFF2-40B4-BE49-F238E27FC236}">
+                <a16:creationId xmlns:a16="http://schemas.microsoft.com/office/drawing/2014/main" id="{59909059-D14E-9A87-C3A1-5A731C56D049}"/>
+              </a:ext>
+            </a:extLst>
+          </p:cNvPr>
+          <p:cNvSpPr/>
+          <p:nvPr/>
+        </p:nvSpPr>
+        <p:spPr>
+          <a:xfrm rot="10953421">
+            <a:off x="722713" y="1970970"/>
+            <a:ext cx="1134324" cy="332292"/>
+          </a:xfrm>
+          <a:custGeom>
+            <a:avLst/>
+            <a:gdLst>
+              <a:gd name="connsiteX0" fmla="*/ 847353 w 850743"/>
+              <a:gd name="connsiteY0" fmla="*/ 123779 h 249219"/>
+              <a:gd name="connsiteX1" fmla="*/ 707811 w 850743"/>
+              <a:gd name="connsiteY1" fmla="*/ 86105 h 249219"/>
+              <a:gd name="connsiteX2" fmla="*/ 680661 w 850743"/>
+              <a:gd name="connsiteY2" fmla="*/ 85053 h 249219"/>
+              <a:gd name="connsiteX3" fmla="*/ 606575 w 850743"/>
+              <a:gd name="connsiteY3" fmla="*/ 112203 h 249219"/>
+              <a:gd name="connsiteX4" fmla="*/ 606154 w 850743"/>
+              <a:gd name="connsiteY4" fmla="*/ 112835 h 249219"/>
+              <a:gd name="connsiteX5" fmla="*/ 605312 w 850743"/>
+              <a:gd name="connsiteY5" fmla="*/ 112835 h 249219"/>
+              <a:gd name="connsiteX6" fmla="*/ 513547 w 850743"/>
+              <a:gd name="connsiteY6" fmla="*/ 114098 h 249219"/>
+              <a:gd name="connsiteX7" fmla="*/ 503655 w 850743"/>
+              <a:gd name="connsiteY7" fmla="*/ 114098 h 249219"/>
+              <a:gd name="connsiteX8" fmla="*/ 512916 w 850743"/>
+              <a:gd name="connsiteY8" fmla="*/ 110730 h 249219"/>
+              <a:gd name="connsiteX9" fmla="*/ 619204 w 850743"/>
+              <a:gd name="connsiteY9" fmla="*/ 8442 h 249219"/>
+              <a:gd name="connsiteX10" fmla="*/ 618151 w 850743"/>
+              <a:gd name="connsiteY10" fmla="*/ 2759 h 249219"/>
+              <a:gd name="connsiteX11" fmla="*/ 612889 w 850743"/>
+              <a:gd name="connsiteY11" fmla="*/ 23 h 249219"/>
+              <a:gd name="connsiteX12" fmla="*/ 612468 w 850743"/>
+              <a:gd name="connsiteY12" fmla="*/ 23 h 249219"/>
+              <a:gd name="connsiteX13" fmla="*/ 430412 w 850743"/>
+              <a:gd name="connsiteY13" fmla="*/ 114519 h 249219"/>
+              <a:gd name="connsiteX14" fmla="*/ 429991 w 850743"/>
+              <a:gd name="connsiteY14" fmla="*/ 115361 h 249219"/>
+              <a:gd name="connsiteX15" fmla="*/ 428938 w 850743"/>
+              <a:gd name="connsiteY15" fmla="*/ 115361 h 249219"/>
+              <a:gd name="connsiteX16" fmla="*/ 334016 w 850743"/>
+              <a:gd name="connsiteY16" fmla="*/ 116623 h 249219"/>
+              <a:gd name="connsiteX17" fmla="*/ 323072 w 850743"/>
+              <a:gd name="connsiteY17" fmla="*/ 116623 h 249219"/>
+              <a:gd name="connsiteX18" fmla="*/ 333385 w 850743"/>
+              <a:gd name="connsiteY18" fmla="*/ 113256 h 249219"/>
+              <a:gd name="connsiteX19" fmla="*/ 456300 w 850743"/>
+              <a:gd name="connsiteY19" fmla="*/ 13072 h 249219"/>
+              <a:gd name="connsiteX20" fmla="*/ 455458 w 850743"/>
+              <a:gd name="connsiteY20" fmla="*/ 7600 h 249219"/>
+              <a:gd name="connsiteX21" fmla="*/ 449985 w 850743"/>
+              <a:gd name="connsiteY21" fmla="*/ 4443 h 249219"/>
+              <a:gd name="connsiteX22" fmla="*/ 449564 w 850743"/>
+              <a:gd name="connsiteY22" fmla="*/ 4443 h 249219"/>
+              <a:gd name="connsiteX23" fmla="*/ 276768 w 850743"/>
+              <a:gd name="connsiteY23" fmla="*/ 112203 h 249219"/>
+              <a:gd name="connsiteX24" fmla="*/ 276347 w 850743"/>
+              <a:gd name="connsiteY24" fmla="*/ 112835 h 249219"/>
+              <a:gd name="connsiteX25" fmla="*/ 273822 w 850743"/>
+              <a:gd name="connsiteY25" fmla="*/ 116202 h 249219"/>
+              <a:gd name="connsiteX26" fmla="*/ 273401 w 850743"/>
+              <a:gd name="connsiteY26" fmla="*/ 117465 h 249219"/>
+              <a:gd name="connsiteX27" fmla="*/ 236148 w 850743"/>
+              <a:gd name="connsiteY27" fmla="*/ 117886 h 249219"/>
+              <a:gd name="connsiteX28" fmla="*/ 5051 w 850743"/>
+              <a:gd name="connsiteY28" fmla="*/ 118728 h 249219"/>
+              <a:gd name="connsiteX29" fmla="*/ 0 w 850743"/>
+              <a:gd name="connsiteY29" fmla="*/ 132198 h 249219"/>
+              <a:gd name="connsiteX30" fmla="*/ 279084 w 850743"/>
+              <a:gd name="connsiteY30" fmla="*/ 130935 h 249219"/>
+              <a:gd name="connsiteX31" fmla="*/ 280136 w 850743"/>
+              <a:gd name="connsiteY31" fmla="*/ 130935 h 249219"/>
+              <a:gd name="connsiteX32" fmla="*/ 280557 w 850743"/>
+              <a:gd name="connsiteY32" fmla="*/ 131777 h 249219"/>
+              <a:gd name="connsiteX33" fmla="*/ 451248 w 850743"/>
+              <a:gd name="connsiteY33" fmla="*/ 244589 h 249219"/>
+              <a:gd name="connsiteX34" fmla="*/ 452722 w 850743"/>
+              <a:gd name="connsiteY34" fmla="*/ 244589 h 249219"/>
+              <a:gd name="connsiteX35" fmla="*/ 458615 w 850743"/>
+              <a:gd name="connsiteY35" fmla="*/ 241432 h 249219"/>
+              <a:gd name="connsiteX36" fmla="*/ 458615 w 850743"/>
+              <a:gd name="connsiteY36" fmla="*/ 234697 h 249219"/>
+              <a:gd name="connsiteX37" fmla="*/ 344329 w 850743"/>
+              <a:gd name="connsiteY37" fmla="*/ 133461 h 249219"/>
+              <a:gd name="connsiteX38" fmla="*/ 336963 w 850743"/>
+              <a:gd name="connsiteY38" fmla="*/ 130304 h 249219"/>
+              <a:gd name="connsiteX39" fmla="*/ 345171 w 850743"/>
+              <a:gd name="connsiteY39" fmla="*/ 130304 h 249219"/>
+              <a:gd name="connsiteX40" fmla="*/ 419046 w 850743"/>
+              <a:gd name="connsiteY40" fmla="*/ 129252 h 249219"/>
+              <a:gd name="connsiteX41" fmla="*/ 432095 w 850743"/>
+              <a:gd name="connsiteY41" fmla="*/ 129252 h 249219"/>
+              <a:gd name="connsiteX42" fmla="*/ 432516 w 850743"/>
+              <a:gd name="connsiteY42" fmla="*/ 130304 h 249219"/>
+              <a:gd name="connsiteX43" fmla="*/ 507444 w 850743"/>
+              <a:gd name="connsiteY43" fmla="*/ 211545 h 249219"/>
+              <a:gd name="connsiteX44" fmla="*/ 655825 w 850743"/>
+              <a:gd name="connsiteY44" fmla="*/ 249219 h 249219"/>
+              <a:gd name="connsiteX45" fmla="*/ 661719 w 850743"/>
+              <a:gd name="connsiteY45" fmla="*/ 245221 h 249219"/>
+              <a:gd name="connsiteX46" fmla="*/ 661298 w 850743"/>
+              <a:gd name="connsiteY46" fmla="*/ 238906 h 249219"/>
+              <a:gd name="connsiteX47" fmla="*/ 514179 w 850743"/>
+              <a:gd name="connsiteY47" fmla="*/ 131146 h 249219"/>
+              <a:gd name="connsiteX48" fmla="*/ 505339 w 850743"/>
+              <a:gd name="connsiteY48" fmla="*/ 127989 h 249219"/>
+              <a:gd name="connsiteX49" fmla="*/ 514600 w 850743"/>
+              <a:gd name="connsiteY49" fmla="*/ 127989 h 249219"/>
+              <a:gd name="connsiteX50" fmla="*/ 594999 w 850743"/>
+              <a:gd name="connsiteY50" fmla="*/ 126726 h 249219"/>
+              <a:gd name="connsiteX51" fmla="*/ 596052 w 850743"/>
+              <a:gd name="connsiteY51" fmla="*/ 126726 h 249219"/>
+              <a:gd name="connsiteX52" fmla="*/ 596473 w 850743"/>
+              <a:gd name="connsiteY52" fmla="*/ 127568 h 249219"/>
+              <a:gd name="connsiteX53" fmla="*/ 598367 w 850743"/>
+              <a:gd name="connsiteY53" fmla="*/ 129672 h 249219"/>
+              <a:gd name="connsiteX54" fmla="*/ 720650 w 850743"/>
+              <a:gd name="connsiteY54" fmla="*/ 161664 h 249219"/>
+              <a:gd name="connsiteX55" fmla="*/ 734120 w 850743"/>
+              <a:gd name="connsiteY55" fmla="*/ 161664 h 249219"/>
+              <a:gd name="connsiteX56" fmla="*/ 847564 w 850743"/>
+              <a:gd name="connsiteY56" fmla="*/ 135776 h 249219"/>
+              <a:gd name="connsiteX57" fmla="*/ 850721 w 850743"/>
+              <a:gd name="connsiteY57" fmla="*/ 129252 h 249219"/>
+              <a:gd name="connsiteX58" fmla="*/ 847353 w 850743"/>
+              <a:gd name="connsiteY58" fmla="*/ 123990 h 249219"/>
+              <a:gd name="connsiteX59" fmla="*/ 295921 w 850743"/>
+              <a:gd name="connsiteY59" fmla="*/ 107363 h 249219"/>
+              <a:gd name="connsiteX60" fmla="*/ 435463 w 850743"/>
+              <a:gd name="connsiteY60" fmla="*/ 19807 h 249219"/>
+              <a:gd name="connsiteX61" fmla="*/ 438830 w 850743"/>
+              <a:gd name="connsiteY61" fmla="*/ 19386 h 249219"/>
+              <a:gd name="connsiteX62" fmla="*/ 437147 w 850743"/>
+              <a:gd name="connsiteY62" fmla="*/ 22333 h 249219"/>
+              <a:gd name="connsiteX63" fmla="*/ 297605 w 850743"/>
+              <a:gd name="connsiteY63" fmla="*/ 110099 h 249219"/>
+              <a:gd name="connsiteX64" fmla="*/ 292975 w 850743"/>
+              <a:gd name="connsiteY64" fmla="*/ 111362 h 249219"/>
+              <a:gd name="connsiteX65" fmla="*/ 295711 w 850743"/>
+              <a:gd name="connsiteY65" fmla="*/ 107573 h 249219"/>
+              <a:gd name="connsiteX66" fmla="*/ 437357 w 850743"/>
+              <a:gd name="connsiteY66" fmla="*/ 225226 h 249219"/>
+              <a:gd name="connsiteX67" fmla="*/ 439672 w 850743"/>
+              <a:gd name="connsiteY67" fmla="*/ 228804 h 249219"/>
+              <a:gd name="connsiteX68" fmla="*/ 435463 w 850743"/>
+              <a:gd name="connsiteY68" fmla="*/ 227752 h 249219"/>
+              <a:gd name="connsiteX69" fmla="*/ 299078 w 850743"/>
+              <a:gd name="connsiteY69" fmla="*/ 135355 h 249219"/>
+              <a:gd name="connsiteX70" fmla="*/ 296342 w 850743"/>
+              <a:gd name="connsiteY70" fmla="*/ 131356 h 249219"/>
+              <a:gd name="connsiteX71" fmla="*/ 300972 w 850743"/>
+              <a:gd name="connsiteY71" fmla="*/ 132619 h 249219"/>
+              <a:gd name="connsiteX72" fmla="*/ 437357 w 850743"/>
+              <a:gd name="connsiteY72" fmla="*/ 225015 h 249219"/>
+              <a:gd name="connsiteX73" fmla="*/ 449144 w 850743"/>
+              <a:gd name="connsiteY73" fmla="*/ 109467 h 249219"/>
+              <a:gd name="connsiteX74" fmla="*/ 599419 w 850743"/>
+              <a:gd name="connsiteY74" fmla="*/ 14966 h 249219"/>
+              <a:gd name="connsiteX75" fmla="*/ 602366 w 850743"/>
+              <a:gd name="connsiteY75" fmla="*/ 14545 h 249219"/>
+              <a:gd name="connsiteX76" fmla="*/ 601103 w 850743"/>
+              <a:gd name="connsiteY76" fmla="*/ 17281 h 249219"/>
+              <a:gd name="connsiteX77" fmla="*/ 450617 w 850743"/>
+              <a:gd name="connsiteY77" fmla="*/ 111993 h 249219"/>
+              <a:gd name="connsiteX78" fmla="*/ 447039 w 850743"/>
+              <a:gd name="connsiteY78" fmla="*/ 112414 h 249219"/>
+              <a:gd name="connsiteX79" fmla="*/ 448933 w 850743"/>
+              <a:gd name="connsiteY79" fmla="*/ 109257 h 249219"/>
+              <a:gd name="connsiteX80" fmla="*/ 638146 w 850743"/>
+              <a:gd name="connsiteY80" fmla="*/ 231961 h 249219"/>
+              <a:gd name="connsiteX81" fmla="*/ 640882 w 850743"/>
+              <a:gd name="connsiteY81" fmla="*/ 235118 h 249219"/>
+              <a:gd name="connsiteX82" fmla="*/ 636673 w 850743"/>
+              <a:gd name="connsiteY82" fmla="*/ 235118 h 249219"/>
+              <a:gd name="connsiteX83" fmla="*/ 520914 w 850743"/>
+              <a:gd name="connsiteY83" fmla="*/ 203337 h 249219"/>
+              <a:gd name="connsiteX84" fmla="*/ 446197 w 850743"/>
+              <a:gd name="connsiteY84" fmla="*/ 130935 h 249219"/>
+              <a:gd name="connsiteX85" fmla="*/ 445566 w 850743"/>
+              <a:gd name="connsiteY85" fmla="*/ 128831 h 249219"/>
+              <a:gd name="connsiteX86" fmla="*/ 451669 w 850743"/>
+              <a:gd name="connsiteY86" fmla="*/ 128831 h 249219"/>
+              <a:gd name="connsiteX87" fmla="*/ 638146 w 850743"/>
+              <a:gd name="connsiteY87" fmla="*/ 231961 h 249219"/>
+              <a:gd name="connsiteX88" fmla="*/ 825885 w 850743"/>
+              <a:gd name="connsiteY88" fmla="*/ 131988 h 249219"/>
+              <a:gd name="connsiteX89" fmla="*/ 734541 w 850743"/>
+              <a:gd name="connsiteY89" fmla="*/ 147983 h 249219"/>
+              <a:gd name="connsiteX90" fmla="*/ 727806 w 850743"/>
+              <a:gd name="connsiteY90" fmla="*/ 147983 h 249219"/>
+              <a:gd name="connsiteX91" fmla="*/ 720650 w 850743"/>
+              <a:gd name="connsiteY91" fmla="*/ 147983 h 249219"/>
+              <a:gd name="connsiteX92" fmla="*/ 616467 w 850743"/>
+              <a:gd name="connsiteY92" fmla="*/ 124832 h 249219"/>
+              <a:gd name="connsiteX93" fmla="*/ 614784 w 850743"/>
+              <a:gd name="connsiteY93" fmla="*/ 123779 h 249219"/>
+              <a:gd name="connsiteX94" fmla="*/ 616046 w 850743"/>
+              <a:gd name="connsiteY94" fmla="*/ 122306 h 249219"/>
+              <a:gd name="connsiteX95" fmla="*/ 679608 w 850743"/>
+              <a:gd name="connsiteY95" fmla="*/ 98523 h 249219"/>
+              <a:gd name="connsiteX96" fmla="*/ 716020 w 850743"/>
+              <a:gd name="connsiteY96" fmla="*/ 100628 h 249219"/>
+              <a:gd name="connsiteX97" fmla="*/ 825885 w 850743"/>
+              <a:gd name="connsiteY97" fmla="*/ 129041 h 249219"/>
+              <a:gd name="connsiteX98" fmla="*/ 829463 w 850743"/>
+              <a:gd name="connsiteY98" fmla="*/ 130514 h 249219"/>
+              <a:gd name="connsiteX99" fmla="*/ 825885 w 850743"/>
+              <a:gd name="connsiteY99" fmla="*/ 132198 h 249219"/>
+            </a:gdLst>
+            <a:ahLst/>
+            <a:cxnLst>
+              <a:cxn ang="0">
+                <a:pos x="connsiteX0" y="connsiteY0"/>
+              </a:cxn>
+              <a:cxn ang="0">
+                <a:pos x="connsiteX1" y="connsiteY1"/>
+              </a:cxn>
+              <a:cxn ang="0">
+                <a:pos x="connsiteX2" y="connsiteY2"/>
+              </a:cxn>
+              <a:cxn ang="0">
+                <a:pos x="connsiteX3" y="connsiteY3"/>
+              </a:cxn>
+              <a:cxn ang="0">
+                <a:pos x="connsiteX4" y="connsiteY4"/>
+              </a:cxn>
+              <a:cxn ang="0">
+                <a:pos x="connsiteX5" y="connsiteY5"/>
+              </a:cxn>
+              <a:cxn ang="0">
+                <a:pos x="connsiteX6" y="connsiteY6"/>
+              </a:cxn>
+              <a:cxn ang="0">
+                <a:pos x="connsiteX7" y="connsiteY7"/>
+              </a:cxn>
+              <a:cxn ang="0">
+                <a:pos x="connsiteX8" y="connsiteY8"/>
+              </a:cxn>
+              <a:cxn ang="0">
+                <a:pos x="connsiteX9" y="connsiteY9"/>
+              </a:cxn>
+              <a:cxn ang="0">
+                <a:pos x="connsiteX10" y="connsiteY10"/>
+              </a:cxn>
+              <a:cxn ang="0">
+                <a:pos x="connsiteX11" y="connsiteY11"/>
+              </a:cxn>
+              <a:cxn ang="0">
+                <a:pos x="connsiteX12" y="connsiteY12"/>
+              </a:cxn>
+              <a:cxn ang="0">
+                <a:pos x="connsiteX13" y="connsiteY13"/>
+              </a:cxn>
+              <a:cxn ang="0">
+                <a:pos x="connsiteX14" y="connsiteY14"/>
+              </a:cxn>
+              <a:cxn ang="0">
+                <a:pos x="connsiteX15" y="connsiteY15"/>
+              </a:cxn>
+              <a:cxn ang="0">
+                <a:pos x="connsiteX16" y="connsiteY16"/>
+              </a:cxn>
+              <a:cxn ang="0">
+                <a:pos x="connsiteX17" y="connsiteY17"/>
+              </a:cxn>
+              <a:cxn ang="0">
+                <a:pos x="connsiteX18" y="connsiteY18"/>
+              </a:cxn>
+              <a:cxn ang="0">
+                <a:pos x="connsiteX19" y="connsiteY19"/>
+              </a:cxn>
+              <a:cxn ang="0">
+                <a:pos x="connsiteX20" y="connsiteY20"/>
+              </a:cxn>
+              <a:cxn ang="0">
+                <a:pos x="connsiteX21" y="connsiteY21"/>
+              </a:cxn>
+              <a:cxn ang="0">
+                <a:pos x="connsiteX22" y="connsiteY22"/>
+              </a:cxn>
+              <a:cxn ang="0">
+                <a:pos x="connsiteX23" y="connsiteY23"/>
+              </a:cxn>
+              <a:cxn ang="0">
+                <a:pos x="connsiteX24" y="connsiteY24"/>
+              </a:cxn>
+              <a:cxn ang="0">
+                <a:pos x="connsiteX25" y="connsiteY25"/>
+              </a:cxn>
+              <a:cxn ang="0">
+                <a:pos x="connsiteX26" y="connsiteY26"/>
+              </a:cxn>
+              <a:cxn ang="0">
+                <a:pos x="connsiteX27" y="connsiteY27"/>
+              </a:cxn>
+              <a:cxn ang="0">
+                <a:pos x="connsiteX28" y="connsiteY28"/>
+              </a:cxn>
+              <a:cxn ang="0">
+                <a:pos x="connsiteX29" y="connsiteY29"/>
+              </a:cxn>
+              <a:cxn ang="0">
+                <a:pos x="connsiteX30" y="connsiteY30"/>
+              </a:cxn>
+              <a:cxn ang="0">
+                <a:pos x="connsiteX31" y="connsiteY31"/>
+              </a:cxn>
+              <a:cxn ang="0">
+                <a:pos x="connsiteX32" y="connsiteY32"/>
+              </a:cxn>
+              <a:cxn ang="0">
+                <a:pos x="connsiteX33" y="connsiteY33"/>
+              </a:cxn>
+              <a:cxn ang="0">
+                <a:pos x="connsiteX34" y="connsiteY34"/>
+              </a:cxn>
+              <a:cxn ang="0">
+                <a:pos x="connsiteX35" y="connsiteY35"/>
+              </a:cxn>
+              <a:cxn ang="0">
+                <a:pos x="connsiteX36" y="connsiteY36"/>
+              </a:cxn>
+              <a:cxn ang="0">
+                <a:pos x="connsiteX37" y="connsiteY37"/>
+              </a:cxn>
+              <a:cxn ang="0">
+                <a:pos x="connsiteX38" y="connsiteY38"/>
+              </a:cxn>
+              <a:cxn ang="0">
+                <a:pos x="connsiteX39" y="connsiteY39"/>
+              </a:cxn>
+              <a:cxn ang="0">
+                <a:pos x="connsiteX40" y="connsiteY40"/>
+              </a:cxn>
+              <a:cxn ang="0">
+                <a:pos x="connsiteX41" y="connsiteY41"/>
+              </a:cxn>
+              <a:cxn ang="0">
+                <a:pos x="connsiteX42" y="connsiteY42"/>
+              </a:cxn>
+              <a:cxn ang="0">
+                <a:pos x="connsiteX43" y="connsiteY43"/>
+              </a:cxn>
+              <a:cxn ang="0">
+                <a:pos x="connsiteX44" y="connsiteY44"/>
+              </a:cxn>
+              <a:cxn ang="0">
+                <a:pos x="connsiteX45" y="connsiteY45"/>
+              </a:cxn>
+              <a:cxn ang="0">
+                <a:pos x="connsiteX46" y="connsiteY46"/>
+              </a:cxn>
+              <a:cxn ang="0">
+                <a:pos x="connsiteX47" y="connsiteY47"/>
+              </a:cxn>
+              <a:cxn ang="0">
+                <a:pos x="connsiteX48" y="connsiteY48"/>
+              </a:cxn>
+              <a:cxn ang="0">
+                <a:pos x="connsiteX49" y="connsiteY49"/>
+              </a:cxn>
+              <a:cxn ang="0">
+                <a:pos x="connsiteX50" y="connsiteY50"/>
+              </a:cxn>
+              <a:cxn ang="0">
+                <a:pos x="connsiteX51" y="connsiteY51"/>
+              </a:cxn>
+              <a:cxn ang="0">
+                <a:pos x="connsiteX52" y="connsiteY52"/>
+              </a:cxn>
+              <a:cxn ang="0">
+                <a:pos x="connsiteX53" y="connsiteY53"/>
+              </a:cxn>
+              <a:cxn ang="0">
+                <a:pos x="connsiteX54" y="connsiteY54"/>
+              </a:cxn>
+              <a:cxn ang="0">
+                <a:pos x="connsiteX55" y="connsiteY55"/>
+              </a:cxn>
+              <a:cxn ang="0">
+                <a:pos x="connsiteX56" y="connsiteY56"/>
+              </a:cxn>
+              <a:cxn ang="0">
+                <a:pos x="connsiteX57" y="connsiteY57"/>
+              </a:cxn>
+              <a:cxn ang="0">
+                <a:pos x="connsiteX58" y="connsiteY58"/>
+              </a:cxn>
+              <a:cxn ang="0">
+                <a:pos x="connsiteX59" y="connsiteY59"/>
+              </a:cxn>
+              <a:cxn ang="0">
+                <a:pos x="connsiteX60" y="connsiteY60"/>
+              </a:cxn>
+              <a:cxn ang="0">
+                <a:pos x="connsiteX61" y="connsiteY61"/>
+              </a:cxn>
+              <a:cxn ang="0">
+                <a:pos x="connsiteX62" y="connsiteY62"/>
+              </a:cxn>
+              <a:cxn ang="0">
+                <a:pos x="connsiteX63" y="connsiteY63"/>
+              </a:cxn>
+              <a:cxn ang="0">
+                <a:pos x="connsiteX64" y="connsiteY64"/>
+              </a:cxn>
+              <a:cxn ang="0">
+                <a:pos x="connsiteX65" y="connsiteY65"/>
+              </a:cxn>
+              <a:cxn ang="0">
+                <a:pos x="connsiteX66" y="connsiteY66"/>
+              </a:cxn>
+              <a:cxn ang="0">
+                <a:pos x="connsiteX67" y="connsiteY67"/>
+              </a:cxn>
+              <a:cxn ang="0">
+                <a:pos x="connsiteX68" y="connsiteY68"/>
+              </a:cxn>
+              <a:cxn ang="0">
+                <a:pos x="connsiteX69" y="connsiteY69"/>
+              </a:cxn>
+              <a:cxn ang="0">
+                <a:pos x="connsiteX70" y="connsiteY70"/>
+              </a:cxn>
+              <a:cxn ang="0">
+                <a:pos x="connsiteX71" y="connsiteY71"/>
+              </a:cxn>
+              <a:cxn ang="0">
+                <a:pos x="connsiteX72" y="connsiteY72"/>
+              </a:cxn>
+              <a:cxn ang="0">
+                <a:pos x="connsiteX73" y="connsiteY73"/>
+              </a:cxn>
+              <a:cxn ang="0">
+                <a:pos x="connsiteX74" y="connsiteY74"/>
+              </a:cxn>
+              <a:cxn ang="0">
+                <a:pos x="connsiteX75" y="connsiteY75"/>
+              </a:cxn>
+              <a:cxn ang="0">
+                <a:pos x="connsiteX76" y="connsiteY76"/>
+              </a:cxn>
+              <a:cxn ang="0">
+                <a:pos x="connsiteX77" y="connsiteY77"/>
+              </a:cxn>
+              <a:cxn ang="0">
+                <a:pos x="connsiteX78" y="connsiteY78"/>
+              </a:cxn>
+              <a:cxn ang="0">
+                <a:pos x="connsiteX79" y="connsiteY79"/>
+              </a:cxn>
+              <a:cxn ang="0">
+                <a:pos x="connsiteX80" y="connsiteY80"/>
+              </a:cxn>
+              <a:cxn ang="0">
+                <a:pos x="connsiteX81" y="connsiteY81"/>
+              </a:cxn>
+              <a:cxn ang="0">
+                <a:pos x="connsiteX82" y="connsiteY82"/>
+              </a:cxn>
+              <a:cxn ang="0">
+                <a:pos x="connsiteX83" y="connsiteY83"/>
+              </a:cxn>
+              <a:cxn ang="0">
+                <a:pos x="connsiteX84" y="connsiteY84"/>
+              </a:cxn>
+              <a:cxn ang="0">
+                <a:pos x="connsiteX85" y="connsiteY85"/>
+              </a:cxn>
+              <a:cxn ang="0">
+                <a:pos x="connsiteX86" y="connsiteY86"/>
+              </a:cxn>
+              <a:cxn ang="0">
+                <a:pos x="connsiteX87" y="connsiteY87"/>
+              </a:cxn>
+              <a:cxn ang="0">
+                <a:pos x="connsiteX88" y="connsiteY88"/>
+              </a:cxn>
+              <a:cxn ang="0">
+                <a:pos x="connsiteX89" y="connsiteY89"/>
+              </a:cxn>
+              <a:cxn ang="0">
+                <a:pos x="connsiteX90" y="connsiteY90"/>
+              </a:cxn>
+              <a:cxn ang="0">
+                <a:pos x="connsiteX91" y="connsiteY91"/>
+              </a:cxn>
+              <a:cxn ang="0">
+                <a:pos x="connsiteX92" y="connsiteY92"/>
+              </a:cxn>
+              <a:cxn ang="0">
+                <a:pos x="connsiteX93" y="connsiteY93"/>
+              </a:cxn>
+              <a:cxn ang="0">
+                <a:pos x="connsiteX94" y="connsiteY94"/>
+              </a:cxn>
+              <a:cxn ang="0">
+                <a:pos x="connsiteX95" y="connsiteY95"/>
+              </a:cxn>
+              <a:cxn ang="0">
+                <a:pos x="connsiteX96" y="connsiteY96"/>
+              </a:cxn>
+              <a:cxn ang="0">
+                <a:pos x="connsiteX97" y="connsiteY97"/>
+              </a:cxn>
+              <a:cxn ang="0">
+                <a:pos x="connsiteX98" y="connsiteY98"/>
+              </a:cxn>
+              <a:cxn ang="0">
+                <a:pos x="connsiteX99" y="connsiteY99"/>
+              </a:cxn>
+            </a:cxnLst>
+            <a:rect l="l" t="t" r="r" b="b"/>
+            <a:pathLst>
+              <a:path w="850743" h="249219">
+                <a:moveTo>
+                  <a:pt x="847353" y="123779"/>
+                </a:moveTo>
+                <a:cubicBezTo>
+                  <a:pt x="802734" y="102522"/>
+                  <a:pt x="755799" y="89894"/>
+                  <a:pt x="707811" y="86105"/>
+                </a:cubicBezTo>
+                <a:cubicBezTo>
+                  <a:pt x="697288" y="85263"/>
+                  <a:pt x="688659" y="85053"/>
+                  <a:pt x="680661" y="85053"/>
+                </a:cubicBezTo>
+                <a:cubicBezTo>
+                  <a:pt x="645933" y="85474"/>
+                  <a:pt x="621729" y="94314"/>
+                  <a:pt x="606575" y="112203"/>
+                </a:cubicBezTo>
+                <a:lnTo>
+                  <a:pt x="606154" y="112835"/>
+                </a:lnTo>
+                <a:lnTo>
+                  <a:pt x="605312" y="112835"/>
+                </a:lnTo>
+                <a:cubicBezTo>
+                  <a:pt x="574794" y="113256"/>
+                  <a:pt x="544066" y="113677"/>
+                  <a:pt x="513547" y="114098"/>
+                </a:cubicBezTo>
+                <a:lnTo>
+                  <a:pt x="503655" y="114098"/>
+                </a:lnTo>
+                <a:cubicBezTo>
+                  <a:pt x="503655" y="114098"/>
+                  <a:pt x="512916" y="110730"/>
+                  <a:pt x="512916" y="110730"/>
+                </a:cubicBezTo>
+                <a:cubicBezTo>
+                  <a:pt x="566165" y="90946"/>
+                  <a:pt x="604050" y="54745"/>
+                  <a:pt x="619204" y="8442"/>
+                </a:cubicBezTo>
+                <a:cubicBezTo>
+                  <a:pt x="619835" y="6548"/>
+                  <a:pt x="619414" y="4443"/>
+                  <a:pt x="618151" y="2759"/>
+                </a:cubicBezTo>
+                <a:cubicBezTo>
+                  <a:pt x="616888" y="1075"/>
+                  <a:pt x="614784" y="-188"/>
+                  <a:pt x="612889" y="23"/>
+                </a:cubicBezTo>
+                <a:lnTo>
+                  <a:pt x="612468" y="23"/>
+                </a:lnTo>
+                <a:cubicBezTo>
+                  <a:pt x="536910" y="4653"/>
+                  <a:pt x="467244" y="48431"/>
+                  <a:pt x="430412" y="114519"/>
+                </a:cubicBezTo>
+                <a:lnTo>
+                  <a:pt x="429991" y="115361"/>
+                </a:lnTo>
+                <a:lnTo>
+                  <a:pt x="428938" y="115361"/>
+                </a:lnTo>
+                <a:cubicBezTo>
+                  <a:pt x="397368" y="115781"/>
+                  <a:pt x="365587" y="116202"/>
+                  <a:pt x="334016" y="116623"/>
+                </a:cubicBezTo>
+                <a:lnTo>
+                  <a:pt x="323072" y="116623"/>
+                </a:lnTo>
+                <a:cubicBezTo>
+                  <a:pt x="323072" y="116623"/>
+                  <a:pt x="333385" y="113256"/>
+                  <a:pt x="333385" y="113256"/>
+                </a:cubicBezTo>
+                <a:cubicBezTo>
+                  <a:pt x="374848" y="99365"/>
+                  <a:pt x="432727" y="73687"/>
+                  <a:pt x="456300" y="13072"/>
+                </a:cubicBezTo>
+                <a:cubicBezTo>
+                  <a:pt x="456931" y="11388"/>
+                  <a:pt x="456720" y="9284"/>
+                  <a:pt x="455458" y="7600"/>
+                </a:cubicBezTo>
+                <a:cubicBezTo>
+                  <a:pt x="454195" y="5706"/>
+                  <a:pt x="452090" y="4443"/>
+                  <a:pt x="449985" y="4443"/>
+                </a:cubicBezTo>
+                <a:lnTo>
+                  <a:pt x="449564" y="4443"/>
+                </a:lnTo>
+                <a:cubicBezTo>
+                  <a:pt x="378005" y="10336"/>
+                  <a:pt x="313390" y="50746"/>
+                  <a:pt x="276768" y="112203"/>
+                </a:cubicBezTo>
+                <a:lnTo>
+                  <a:pt x="276347" y="112835"/>
+                </a:lnTo>
+                <a:cubicBezTo>
+                  <a:pt x="275085" y="113677"/>
+                  <a:pt x="274243" y="114940"/>
+                  <a:pt x="273822" y="116202"/>
+                </a:cubicBezTo>
+                <a:lnTo>
+                  <a:pt x="273401" y="117465"/>
+                </a:lnTo>
+                <a:lnTo>
+                  <a:pt x="236148" y="117886"/>
+                </a:lnTo>
+                <a:cubicBezTo>
+                  <a:pt x="216574" y="118097"/>
+                  <a:pt x="96816" y="118307"/>
+                  <a:pt x="5051" y="118728"/>
+                </a:cubicBezTo>
+                <a:cubicBezTo>
+                  <a:pt x="3368" y="123148"/>
+                  <a:pt x="1684" y="127568"/>
+                  <a:pt x="0" y="132198"/>
+                </a:cubicBezTo>
+                <a:cubicBezTo>
+                  <a:pt x="105235" y="131777"/>
+                  <a:pt x="246461" y="131356"/>
+                  <a:pt x="279084" y="130935"/>
+                </a:cubicBezTo>
+                <a:lnTo>
+                  <a:pt x="280136" y="130935"/>
+                </a:lnTo>
+                <a:cubicBezTo>
+                  <a:pt x="280136" y="130935"/>
+                  <a:pt x="280557" y="131777"/>
+                  <a:pt x="280557" y="131777"/>
+                </a:cubicBezTo>
+                <a:cubicBezTo>
+                  <a:pt x="319073" y="191972"/>
+                  <a:pt x="381162" y="233224"/>
+                  <a:pt x="451248" y="244589"/>
+                </a:cubicBezTo>
+                <a:cubicBezTo>
+                  <a:pt x="451669" y="244589"/>
+                  <a:pt x="452090" y="244589"/>
+                  <a:pt x="452722" y="244589"/>
+                </a:cubicBezTo>
+                <a:cubicBezTo>
+                  <a:pt x="455247" y="244589"/>
+                  <a:pt x="457352" y="243326"/>
+                  <a:pt x="458615" y="241432"/>
+                </a:cubicBezTo>
+                <a:cubicBezTo>
+                  <a:pt x="459878" y="239327"/>
+                  <a:pt x="459878" y="237012"/>
+                  <a:pt x="458615" y="234697"/>
+                </a:cubicBezTo>
+                <a:cubicBezTo>
+                  <a:pt x="430833" y="179343"/>
+                  <a:pt x="381162" y="149036"/>
+                  <a:pt x="344329" y="133461"/>
+                </a:cubicBezTo>
+                <a:lnTo>
+                  <a:pt x="336963" y="130304"/>
+                </a:lnTo>
+                <a:lnTo>
+                  <a:pt x="345171" y="130304"/>
+                </a:lnTo>
+                <a:cubicBezTo>
+                  <a:pt x="345171" y="130304"/>
+                  <a:pt x="398841" y="129462"/>
+                  <a:pt x="419046" y="129252"/>
+                </a:cubicBezTo>
+                <a:lnTo>
+                  <a:pt x="432095" y="129252"/>
+                </a:lnTo>
+                <a:cubicBezTo>
+                  <a:pt x="432095" y="129252"/>
+                  <a:pt x="432516" y="130304"/>
+                  <a:pt x="432516" y="130304"/>
+                </a:cubicBezTo>
+                <a:cubicBezTo>
+                  <a:pt x="440304" y="162085"/>
+                  <a:pt x="465350" y="189235"/>
+                  <a:pt x="507444" y="211545"/>
+                </a:cubicBezTo>
+                <a:cubicBezTo>
+                  <a:pt x="552274" y="235328"/>
+                  <a:pt x="603629" y="248378"/>
+                  <a:pt x="655825" y="249219"/>
+                </a:cubicBezTo>
+                <a:cubicBezTo>
+                  <a:pt x="658141" y="249219"/>
+                  <a:pt x="660666" y="247536"/>
+                  <a:pt x="661719" y="245221"/>
+                </a:cubicBezTo>
+                <a:cubicBezTo>
+                  <a:pt x="662771" y="243116"/>
+                  <a:pt x="662560" y="240801"/>
+                  <a:pt x="661298" y="238906"/>
+                </a:cubicBezTo>
+                <a:cubicBezTo>
+                  <a:pt x="623413" y="189656"/>
+                  <a:pt x="572690" y="152403"/>
+                  <a:pt x="514179" y="131146"/>
+                </a:cubicBezTo>
+                <a:lnTo>
+                  <a:pt x="505339" y="127989"/>
+                </a:lnTo>
+                <a:lnTo>
+                  <a:pt x="514600" y="127989"/>
+                </a:lnTo>
+                <a:cubicBezTo>
+                  <a:pt x="514600" y="127989"/>
+                  <a:pt x="572900" y="126936"/>
+                  <a:pt x="594999" y="126726"/>
+                </a:cubicBezTo>
+                <a:lnTo>
+                  <a:pt x="596052" y="126726"/>
+                </a:lnTo>
+                <a:cubicBezTo>
+                  <a:pt x="596052" y="126726"/>
+                  <a:pt x="596473" y="127568"/>
+                  <a:pt x="596473" y="127568"/>
+                </a:cubicBezTo>
+                <a:cubicBezTo>
+                  <a:pt x="596894" y="128410"/>
+                  <a:pt x="597736" y="129041"/>
+                  <a:pt x="598367" y="129672"/>
+                </a:cubicBezTo>
+                <a:cubicBezTo>
+                  <a:pt x="629517" y="150719"/>
+                  <a:pt x="669506" y="161243"/>
+                  <a:pt x="720650" y="161664"/>
+                </a:cubicBezTo>
+                <a:cubicBezTo>
+                  <a:pt x="725070" y="161664"/>
+                  <a:pt x="729700" y="161664"/>
+                  <a:pt x="734120" y="161664"/>
+                </a:cubicBezTo>
+                <a:cubicBezTo>
+                  <a:pt x="768637" y="161243"/>
+                  <a:pt x="812836" y="158086"/>
+                  <a:pt x="847564" y="135776"/>
+                </a:cubicBezTo>
+                <a:cubicBezTo>
+                  <a:pt x="849668" y="134513"/>
+                  <a:pt x="850931" y="131777"/>
+                  <a:pt x="850721" y="129252"/>
+                </a:cubicBezTo>
+                <a:cubicBezTo>
+                  <a:pt x="850721" y="126936"/>
+                  <a:pt x="849248" y="125042"/>
+                  <a:pt x="847353" y="123990"/>
+                </a:cubicBezTo>
+                <a:close/>
+                <a:moveTo>
+                  <a:pt x="295921" y="107363"/>
+                </a:moveTo>
+                <a:cubicBezTo>
+                  <a:pt x="328544" y="60428"/>
+                  <a:pt x="379478" y="28647"/>
+                  <a:pt x="435463" y="19807"/>
+                </a:cubicBezTo>
+                <a:lnTo>
+                  <a:pt x="438830" y="19386"/>
+                </a:lnTo>
+                <a:lnTo>
+                  <a:pt x="437147" y="22333"/>
+                </a:lnTo>
+                <a:cubicBezTo>
+                  <a:pt x="409996" y="73687"/>
+                  <a:pt x="351485" y="95576"/>
+                  <a:pt x="297605" y="110099"/>
+                </a:cubicBezTo>
+                <a:lnTo>
+                  <a:pt x="292975" y="111362"/>
+                </a:lnTo>
+                <a:lnTo>
+                  <a:pt x="295711" y="107573"/>
+                </a:lnTo>
+                <a:close/>
+                <a:moveTo>
+                  <a:pt x="437357" y="225226"/>
+                </a:moveTo>
+                <a:lnTo>
+                  <a:pt x="439672" y="228804"/>
+                </a:lnTo>
+                <a:lnTo>
+                  <a:pt x="435463" y="227752"/>
+                </a:lnTo>
+                <a:cubicBezTo>
+                  <a:pt x="380530" y="214071"/>
+                  <a:pt x="332122" y="181238"/>
+                  <a:pt x="299078" y="135355"/>
+                </a:cubicBezTo>
+                <a:lnTo>
+                  <a:pt x="296342" y="131356"/>
+                </a:lnTo>
+                <a:lnTo>
+                  <a:pt x="300972" y="132619"/>
+                </a:lnTo>
+                <a:cubicBezTo>
+                  <a:pt x="361167" y="149036"/>
+                  <a:pt x="409575" y="181869"/>
+                  <a:pt x="437357" y="225015"/>
+                </a:cubicBezTo>
+                <a:close/>
+                <a:moveTo>
+                  <a:pt x="449144" y="109467"/>
+                </a:moveTo>
+                <a:cubicBezTo>
+                  <a:pt x="482608" y="57902"/>
+                  <a:pt x="538804" y="22543"/>
+                  <a:pt x="599419" y="14966"/>
+                </a:cubicBezTo>
+                <a:lnTo>
+                  <a:pt x="602366" y="14545"/>
+                </a:lnTo>
+                <a:lnTo>
+                  <a:pt x="601103" y="17281"/>
+                </a:lnTo>
+                <a:cubicBezTo>
+                  <a:pt x="587633" y="47379"/>
+                  <a:pt x="550169" y="99996"/>
+                  <a:pt x="450617" y="111993"/>
+                </a:cubicBezTo>
+                <a:lnTo>
+                  <a:pt x="447039" y="112414"/>
+                </a:lnTo>
+                <a:lnTo>
+                  <a:pt x="448933" y="109257"/>
+                </a:lnTo>
+                <a:close/>
+                <a:moveTo>
+                  <a:pt x="638146" y="231961"/>
+                </a:moveTo>
+                <a:lnTo>
+                  <a:pt x="640882" y="235118"/>
+                </a:lnTo>
+                <a:lnTo>
+                  <a:pt x="636673" y="235118"/>
+                </a:lnTo>
+                <a:cubicBezTo>
+                  <a:pt x="595631" y="231750"/>
+                  <a:pt x="556694" y="221227"/>
+                  <a:pt x="520914" y="203337"/>
+                </a:cubicBezTo>
+                <a:cubicBezTo>
+                  <a:pt x="478820" y="182500"/>
+                  <a:pt x="454405" y="158717"/>
+                  <a:pt x="446197" y="130935"/>
+                </a:cubicBezTo>
+                <a:lnTo>
+                  <a:pt x="445566" y="128831"/>
+                </a:lnTo>
+                <a:lnTo>
+                  <a:pt x="451669" y="128831"/>
+                </a:lnTo>
+                <a:cubicBezTo>
+                  <a:pt x="523019" y="139986"/>
+                  <a:pt x="590790" y="177660"/>
+                  <a:pt x="638146" y="231961"/>
+                </a:cubicBezTo>
+                <a:close/>
+                <a:moveTo>
+                  <a:pt x="825885" y="131988"/>
+                </a:moveTo>
+                <a:cubicBezTo>
+                  <a:pt x="796419" y="145458"/>
+                  <a:pt x="763165" y="147562"/>
+                  <a:pt x="734541" y="147983"/>
+                </a:cubicBezTo>
+                <a:cubicBezTo>
+                  <a:pt x="732226" y="147983"/>
+                  <a:pt x="729911" y="147983"/>
+                  <a:pt x="727806" y="147983"/>
+                </a:cubicBezTo>
+                <a:cubicBezTo>
+                  <a:pt x="725491" y="147983"/>
+                  <a:pt x="722965" y="147983"/>
+                  <a:pt x="720650" y="147983"/>
+                </a:cubicBezTo>
+                <a:cubicBezTo>
+                  <a:pt x="678135" y="147562"/>
+                  <a:pt x="644039" y="139986"/>
+                  <a:pt x="616467" y="124832"/>
+                </a:cubicBezTo>
+                <a:lnTo>
+                  <a:pt x="614784" y="123779"/>
+                </a:lnTo>
+                <a:lnTo>
+                  <a:pt x="616046" y="122306"/>
+                </a:lnTo>
+                <a:cubicBezTo>
+                  <a:pt x="628043" y="106731"/>
+                  <a:pt x="648880" y="98944"/>
+                  <a:pt x="679608" y="98523"/>
+                </a:cubicBezTo>
+                <a:cubicBezTo>
+                  <a:pt x="692237" y="98523"/>
+                  <a:pt x="704654" y="99575"/>
+                  <a:pt x="716020" y="100628"/>
+                </a:cubicBezTo>
+                <a:cubicBezTo>
+                  <a:pt x="753273" y="104206"/>
+                  <a:pt x="790316" y="113887"/>
+                  <a:pt x="825885" y="129041"/>
+                </a:cubicBezTo>
+                <a:lnTo>
+                  <a:pt x="829463" y="130514"/>
+                </a:lnTo>
+                <a:lnTo>
+                  <a:pt x="825885" y="132198"/>
+                </a:lnTo>
+                <a:close/>
+              </a:path>
+            </a:pathLst>
+          </a:custGeom>
+          <a:solidFill>
+            <a:schemeClr val="accent6">
+              <a:lumMod val="50000"/>
+            </a:schemeClr>
+          </a:solidFill>
+          <a:ln w="20955" cap="flat">
+            <a:noFill/>
+            <a:prstDash val="solid"/>
+            <a:miter/>
+          </a:ln>
+        </p:spPr>
+        <p:txBody>
+          <a:bodyPr rtlCol="0" anchor="ctr"/>
+          <a:lstStyle/>
+          <a:p>
+            <a:pPr marL="0" marR="0" lvl="0" indent="0" algn="l" defTabSz="1219140" rtl="0" eaLnBrk="0" fontAlgn="base" latinLnBrk="0" hangingPunct="0">
+              <a:lnSpc>
+                <a:spcPct val="100000"/>
+              </a:lnSpc>
+              <a:spcBef>
+                <a:spcPct val="0"/>
+              </a:spcBef>
+              <a:spcAft>
+                <a:spcPct val="0"/>
+              </a:spcAft>
+              <a:buClrTx/>
+              <a:buSzTx/>
+              <a:buFontTx/>
+              <a:buNone/>
+              <a:tabLst/>
+              <a:defRPr/>
+            </a:pPr>
+            <a:endParaRPr kumimoji="1" lang="ko-KR" altLang="en-US" sz="2400" b="0" i="0" u="none" strike="noStrike" kern="1200" cap="none" spc="0" normalizeH="0" baseline="0" noProof="0">
+              <a:ln>
+                <a:noFill/>
+              </a:ln>
+              <a:solidFill>
+                <a:prstClr val="black"/>
+              </a:solidFill>
+              <a:effectLst/>
+              <a:uLnTx/>
+              <a:uFillTx/>
+              <a:latin typeface="굴림" panose="020B0600000101010101" pitchFamily="34" charset="-127"/>
+              <a:ea typeface="굴림" panose="020B0600000101010101" pitchFamily="34" charset="-127"/>
+              <a:cs typeface="+mn-cs"/>
+            </a:endParaRPr>
+          </a:p>
+        </p:txBody>
+      </p:sp>
+      <p:sp>
+        <p:nvSpPr>
+          <p:cNvPr id="6" name="TextBox 5">
+            <a:extLst>
+              <a:ext uri="{FF2B5EF4-FFF2-40B4-BE49-F238E27FC236}">
+                <a16:creationId xmlns:a16="http://schemas.microsoft.com/office/drawing/2014/main" id="{3F0B8729-3DE5-F574-A00E-A2D375E3F9CD}"/>
+              </a:ext>
+            </a:extLst>
+          </p:cNvPr>
+          <p:cNvSpPr txBox="1"/>
+          <p:nvPr/>
+        </p:nvSpPr>
+        <p:spPr>
+          <a:xfrm>
+            <a:off x="541691" y="2565221"/>
+            <a:ext cx="3867332" cy="523220"/>
+          </a:xfrm>
+          <a:prstGeom prst="rect">
+            <a:avLst/>
+          </a:prstGeom>
+          <a:noFill/>
+        </p:spPr>
+        <p:txBody>
+          <a:bodyPr wrap="square" rtlCol="0">
+            <a:spAutoFit/>
+          </a:bodyPr>
+          <a:lstStyle/>
+          <a:p>
+            <a:pPr marL="0" marR="0" lvl="0" indent="0" algn="l" defTabSz="1219140" rtl="0" eaLnBrk="0" fontAlgn="base" latinLnBrk="0" hangingPunct="0">
+              <a:lnSpc>
+                <a:spcPct val="100000"/>
+              </a:lnSpc>
+              <a:spcBef>
+                <a:spcPct val="0"/>
+              </a:spcBef>
+              <a:spcAft>
+                <a:spcPct val="0"/>
+              </a:spcAft>
+              <a:buClrTx/>
+              <a:buSzTx/>
+              <a:buFontTx/>
+              <a:buNone/>
+              <a:tabLst/>
+              <a:defRPr sz="2800">
+                <a:solidFill>
+                  <a:srgbClr val="8FA79F"/>
+                </a:solidFill>
+                <a:latin typeface="나눔스퀘어 네오 ExtraBold"/>
+              </a:defRPr>
+            </a:pPr>
+            <a:r>
+              <a:t>Psa 1:1</a:t>
+            </a:r>
+            <a:endParaRPr kumimoji="1" lang="en-US" altLang="ko-KR" sz="2800" b="1" i="0" u="none" strike="noStrike" kern="1200" cap="none" spc="0" normalizeH="0" baseline="0" noProof="0" dirty="0">
+              <a:ln>
+                <a:noFill/>
+              </a:ln>
+              <a:solidFill>
+                <a:srgbClr val="8FA79F"/>
+              </a:solidFill>
+              <a:effectLst/>
+              <a:uLnTx/>
+              <a:uFillTx/>
+              <a:latin typeface="나눔스퀘어 네오 ExtraBold" panose="00000900000000000000" pitchFamily="2" charset="-127"/>
+              <a:ea typeface="나눔스퀘어 네오 ExtraBold" panose="00000900000000000000" pitchFamily="2" charset="-127"/>
+              <a:cs typeface="+mn-cs"/>
+            </a:endParaRPr>
+          </a:p>
+          <a:p>
+            <a:pPr>
+              <a:defRPr sz="2800">
+                <a:solidFill>
+                  <a:srgbClr val="8FA79F"/>
+                </a:solidFill>
+                <a:latin typeface="나눔스퀘어 네오 ExtraBold"/>
+              </a:defRPr>
+            </a:pPr>
+            <a:r>
+              <a:t>Rev 2:2</a:t>
+            </a:r>
+          </a:p>
+          <a:p>
+            <a:pPr>
+              <a:defRPr sz="2800">
+                <a:solidFill>
+                  <a:srgbClr val="8FA79F"/>
+                </a:solidFill>
+                <a:latin typeface="나눔스퀘어 네오 ExtraBold"/>
+              </a:defRPr>
+            </a:pPr>
+          </a:p>
+        </p:txBody>
+      </p:sp>
+      <p:sp>
+        <p:nvSpPr>
+          <p:cNvPr id="5" name="TextBox 4">
+            <a:extLst>
+              <a:ext uri="{FF2B5EF4-FFF2-40B4-BE49-F238E27FC236}">
+                <a16:creationId xmlns:a16="http://schemas.microsoft.com/office/drawing/2014/main" id="{66F56BDC-842A-F82D-62A9-29DCB99DBEEB}"/>
+              </a:ext>
+            </a:extLst>
+          </p:cNvPr>
+          <p:cNvSpPr txBox="1"/>
+          <p:nvPr/>
+        </p:nvSpPr>
+        <p:spPr>
+          <a:xfrm>
+            <a:off x="4606904" y="414536"/>
+            <a:ext cx="7246825" cy="369332"/>
+          </a:xfrm>
+          <a:prstGeom prst="rect">
+            <a:avLst/>
+          </a:prstGeom>
+          <a:noFill/>
+        </p:spPr>
+        <p:txBody>
+          <a:bodyPr wrap="square" rtlCol="0">
+            <a:spAutoFit/>
+          </a:bodyPr>
+          <a:lstStyle/>
+          <a:p>
+            <a:pPr>
+              <a:defRPr sz="2800">
+                <a:solidFill>
+                  <a:srgbClr val="1F3337"/>
+                </a:solidFill>
+                <a:latin typeface="나눔스퀘어 네오 Bold"/>
+              </a:defRPr>
+            </a:pPr>
+            <a:r>
+              <a:t>¹˸¹ 복 있는 사람은 악인들의 꾀를 따르지 아니하며 죄인들의 길에 서지 아니하며 오만한 자들의 자리에 앉지 아니하고</a:t>
+            </a:r>
+          </a:p>
+          <a:p>
+            <a:pPr>
+              <a:defRPr sz="2800">
+                <a:solidFill>
+                  <a:srgbClr val="1F3337"/>
+                </a:solidFill>
+                <a:latin typeface="나눔스퀘어 네오 Bold"/>
+              </a:defRPr>
+            </a:pPr>
+            <a:r>
+              <a:t>²˸² 내가 네 행위와 수고와 네 인내를 알고 또 악한 자들을 용납하지 아니한 것과 자칭 사도라 하되 아닌 자들을 시험하여 그의 거짓된 것을 네가 드러낸 것과</a:t>
+            </a:r>
+          </a:p>
+        </p:txBody>
+      </p:sp>
+      <p:sp>
+        <p:nvSpPr>
+          <p:cNvPr id="3" name="TextBox 2">
+            <a:extLst>
+              <a:ext uri="{FF2B5EF4-FFF2-40B4-BE49-F238E27FC236}">
+                <a16:creationId xmlns:a16="http://schemas.microsoft.com/office/drawing/2014/main" id="{9992D8C0-60E8-B6D2-A388-9B378A00EBBC}"/>
+              </a:ext>
+            </a:extLst>
+          </p:cNvPr>
+          <p:cNvSpPr txBox="1"/>
+          <p:nvPr/>
+        </p:nvSpPr>
+        <p:spPr>
+          <a:xfrm>
+            <a:off x="4606908" y="3992331"/>
+            <a:ext cx="7246821" cy="369332"/>
+          </a:xfrm>
+          <a:prstGeom prst="rect">
+            <a:avLst/>
+          </a:prstGeom>
+          <a:noFill/>
+        </p:spPr>
+        <p:txBody>
+          <a:bodyPr wrap="square" rtlCol="0">
+            <a:spAutoFit/>
+          </a:bodyPr>
+          <a:lstStyle/>
+          <a:p>
+            <a:pPr>
+              <a:defRPr sz="2000">
+                <a:solidFill>
+                  <a:srgbClr val="4F655E"/>
+                </a:solidFill>
+                <a:latin typeface="Pretendard Variable"/>
+              </a:defRPr>
+            </a:pPr>
+            <a:r>
+              <a:t>¹:¹ Blessed is the manwho walks not in the counsel of the wicked, nor stands in the way of sinners, nor sits in the seat of scoffers;</a:t>
+            </a:r>
+            <a:endParaRPr lang="ko-KR" altLang="en-US" dirty="0"/>
+          </a:p>
+          <a:p>
+            <a:pPr>
+              <a:defRPr sz="2000">
+                <a:solidFill>
+                  <a:srgbClr val="4F655E"/>
+                </a:solidFill>
+                <a:latin typeface="Pretendard Variable"/>
+              </a:defRPr>
+            </a:pPr>
+            <a:r>
+              <a:t>²:² "'I know your works, your toil and your patient endurance, and how you cannot bear with those who are evil, but have tested those who call themselves apostles and are not, and found them to be false.</a:t>
+            </a:r>
+          </a:p>
+        </p:txBody>
+      </p:sp>
+    </p:spTree>
   </p:cSld>
   <p:clrMapOvr>
     <a:masterClrMapping/>
